--- a/slides/Mini-Muse-Step-by-Step-Implementation.pptx
+++ b/slides/Mini-Muse-Step-by-Step-Implementation.pptx
@@ -13905,7 +13905,7 @@
                 </a:solidFill>
                 <a:latin typeface="Consolas"/>
               </a:rPr>
-              <a:t>123 passed, 2 skipped in 0.8s                           </a:t>
+              <a:t>126 passed, 2 skipped in 2.7s                           </a:t>
             </a:r>
             <a:r>
               <a:rPr sz="1250">
@@ -16914,7 +16914,7 @@
                 </a:solidFill>
                 <a:latin typeface="Carlito"/>
               </a:rPr>
-              <a:t>Chat UI + 123 offline tests</a:t>
+              <a:t>Chat UI + 126 offline tests</a:t>
             </a:r>
           </a:p>
         </p:txBody>
@@ -19818,7 +19818,7 @@
                 </a:solidFill>
                 <a:latin typeface="Caladea"/>
               </a:rPr>
-              <a:t>123</a:t>
+              <a:t>126</a:t>
             </a:r>
           </a:p>
         </p:txBody>
@@ -21419,7 +21419,7 @@
                           </a:solidFill>
                           <a:latin typeface="Carlito"/>
                         </a:rPr>
-                        <a:t>123 offline tests + 2 live tests</a:t>
+                        <a:t>126 offline tests + 2 live tests</a:t>
                       </a:r>
                     </a:p>
                   </a:txBody>
